--- a/2026中国国际大学生创新大赛_网评路演PPT_Rainbow-FinGPT.pptx
+++ b/2026中国国际大学生创新大赛_网评路演PPT_Rainbow-FinGPT.pptx
@@ -3162,15 +3162,15 @@
           <a:lstStyle/>
           <a:p>
             <a:pPr>
-              <a:defRPr sz="1400" b="1">
-                <a:solidFill>
-                  <a:srgbClr val="60A5FA"/>
+              <a:defRPr sz="1400">
+                <a:solidFill>
+                  <a:srgbClr val="D97706"/>
                 </a:solidFill>
                 <a:latin typeface="微软雅黑"/>
               </a:defRPr>
             </a:pPr>
             <a:r>
-              <a:t>🏆 2026 中国国际大学生创新大赛 · 产业命题赛道 (新工科/01)</a:t>
+              <a:t>2026 中国国际大学生创新大赛 · 产业命题赛道 (达观数据命题)</a:t>
             </a:r>
           </a:p>
           <a:p>
@@ -3178,7 +3178,7 @@
               <a:spcBef>
                 <a:spcPts val="800"/>
               </a:spcBef>
-              <a:defRPr sz="3800" b="1">
+              <a:defRPr sz="4400" b="1">
                 <a:solidFill>
                   <a:srgbClr val="FFFFFF"/>
                 </a:solidFill>
@@ -3215,7 +3215,7 @@
               </a:defRPr>
             </a:pPr>
             <a:r>
-              <a:t>三层解耦架构 · 100%消除幻觉 · Fama-MacBeth特质Alpha · Trend Gate C浪拦截 · 击败行业ETF</a:t>
+              <a:t>四位一体全流程链 · 100%消除幻觉 · Fama-MacBeth特质Alpha · Trend Gate C浪拦截 · 击败行业ETF</a:t>
             </a:r>
           </a:p>
           <a:p>
@@ -3672,7 +3672,7 @@
               </a:defRPr>
             </a:pPr>
             <a:r>
-              <a:t>2. 破局之道：Rainbow-FinGPT 首创“三层解耦”架构</a:t>
+              <a:t>2. 破局之道：Rainbow-FinGPT 首创“四位一体”全流程技术链</a:t>
             </a:r>
           </a:p>
         </p:txBody>
@@ -3745,7 +3745,7 @@
           <a:lstStyle/>
           <a:p>
             <a:pPr>
-              <a:defRPr sz="1500" b="1">
+              <a:defRPr sz="1450" b="1">
                 <a:solidFill>
                   <a:srgbClr val="2563EB"/>
                 </a:solidFill>
@@ -3753,7 +3753,7 @@
               </a:defRPr>
             </a:pPr>
             <a:r>
-              <a:t>Layer 1 · SCNU-RAG 定性知识引擎</a:t>
+              <a:t>Stage 1 &amp; 2 · FinRobot 专家审议 + FinGPT 事实抽取</a:t>
             </a:r>
           </a:p>
           <a:p>
@@ -3761,7 +3761,7 @@
               <a:spcBef>
                 <a:spcPts val="400"/>
               </a:spcBef>
-              <a:defRPr sz="1150">
+              <a:defRPr sz="1100">
                 <a:solidFill>
                   <a:srgbClr val="1E293B"/>
                 </a:solidFill>
@@ -3769,15 +3769,11 @@
               </a:defRPr>
             </a:pPr>
             <a:r>
-              <a:t>【事实-观点-推论 (FOI) 三元知识抽取】</a:t>
+              <a:t>【多专家博弈审议 + FOI 三元事实抽取】</a:t>
             </a:r>
             <a:br/>
             <a:r>
-              <a:t>• 严格锚定 100% 原文段落坐标，彻底消除大模型数值幻觉</a:t>
-            </a:r>
-            <a:br/>
-            <a:r>
-              <a:t>• 领先卖方研报 5 日捕获供应链调价与涨价信号</a:t>
+              <a:t>• 宏观/行业/风控多智能体对抗博弈；绑定 100% 原文段落坐标，彻底消除大模型数值幻觉</a:t>
             </a:r>
           </a:p>
         </p:txBody>
@@ -3850,7 +3846,7 @@
           <a:lstStyle/>
           <a:p>
             <a:pPr>
-              <a:defRPr sz="1500" b="1">
+              <a:defRPr sz="1450" b="1">
                 <a:solidFill>
                   <a:srgbClr val="D97706"/>
                 </a:solidFill>
@@ -3858,7 +3854,7 @@
               </a:defRPr>
             </a:pPr>
             <a:r>
-              <a:t>Layer 2 · Fama-MacBeth 资产定价引擎</a:t>
+              <a:t>Stage 3 · NALE 产业与资源网络图谱</a:t>
             </a:r>
           </a:p>
           <a:p>
@@ -3866,7 +3862,7 @@
               <a:spcBef>
                 <a:spcPts val="400"/>
               </a:spcBef>
-              <a:defRPr sz="1150">
+              <a:defRPr sz="1100">
                 <a:solidFill>
                   <a:srgbClr val="1E293B"/>
                 </a:solidFill>
@@ -3874,15 +3870,11 @@
               </a:defRPr>
             </a:pPr>
             <a:r>
-              <a:t>【252日滚动回归 + Newey-West HAC 稳健估计】</a:t>
+              <a:t>【产业邻接矩阵 + AISC 成本护城河】</a:t>
             </a:r>
             <a:br/>
             <a:r>
-              <a:t>• 剥离 Carhart 四因子系统性风险，量化纯个股特质 Alpha</a:t>
-            </a:r>
-            <a:br/>
-            <a:r>
-              <a:t>• NALE 供应链图谱阻尼网络，实现供需跨周期传导定价</a:t>
+              <a:t>• 计算千亿龙头对二线高弹性标的的跨市场溢出与资金传导，领先卖方研报 5 日捕获调价信号</a:t>
             </a:r>
           </a:p>
         </p:txBody>
@@ -3955,7 +3947,7 @@
           <a:lstStyle/>
           <a:p>
             <a:pPr>
-              <a:defRPr sz="1500" b="1">
+              <a:defRPr sz="1450" b="1">
                 <a:solidFill>
                   <a:srgbClr val="16A34A"/>
                 </a:solidFill>
@@ -3963,7 +3955,7 @@
               </a:defRPr>
             </a:pPr>
             <a:r>
-              <a:t>Layer 3 · Trend Gate™ 战术执行引擎</a:t>
+              <a:t>Stage 4 · KHunter 严谨计量模拟与风控执行</a:t>
             </a:r>
           </a:p>
           <a:p>
@@ -3971,7 +3963,7 @@
               <a:spcBef>
                 <a:spcPts val="400"/>
               </a:spcBef>
-              <a:defRPr sz="1150">
+              <a:defRPr sz="1100">
                 <a:solidFill>
                   <a:srgbClr val="1E293B"/>
                 </a:solidFill>
@@ -3979,15 +3971,11 @@
               </a:defRPr>
             </a:pPr>
             <a:r>
-              <a:t>【纯因果 ZigZag 状态机 + C 浪硬排斥门禁】</a:t>
+              <a:t>【252日滚动回归 + Newey-West HAC 检验 + Trend Gate™ 因果状态机】</a:t>
             </a:r>
             <a:br/>
             <a:r>
-              <a:t>• 0.618 斐波那契回撤进场，C 浪主跌破位强制清仓防守</a:t>
-            </a:r>
-            <a:br/>
-            <a:r>
-              <a:t>• 样本外实测回撤腰斩压制，调仓摩擦仅 0.15%</a:t>
+              <a:t>• 纯数学计量公式推导资产定价；C 浪主跌破位强制清仓防守，样本外实测回撤腰斩压制</a:t>
             </a:r>
           </a:p>
         </p:txBody>
@@ -4176,7 +4164,7 @@
             </a:r>
             <a:br/>
             <a:r>
-              <a:t>SCNU-RAG 抓取 DRAM/NAND 现货涨价与原厂减产信号，Fama-MacBeth 剥离科技股特质 Alpha (t=2.68)，Trend Gate 在 688525 单边暴跌中成功拦截 C 浪破位！</a:t>
+              <a:t>SCNU-RAG 提前 5 日抽取上游 NAND 现货跳涨事实；NALE 供应链网络动态超配领头羊；Trend Gate 拦截周期下行。</a:t>
             </a:r>
           </a:p>
         </p:txBody>
@@ -4394,6 +4382,30 @@
           </a:p>
         </p:txBody>
       </p:sp>
+      <p:pic>
+        <p:nvPicPr>
+          <p:cNvPr id="5" name="Picture 4" descr="fig1_cumulative_equity_and_drawdown.png"/>
+          <p:cNvPicPr>
+            <a:picLocks noChangeAspect="1"/>
+          </p:cNvPicPr>
+          <p:nvPr/>
+        </p:nvPicPr>
+        <p:blipFill>
+          <a:blip r:embed="rId2"/>
+          <a:stretch>
+            <a:fillRect/>
+          </a:stretch>
+        </p:blipFill>
+        <p:spPr>
+          <a:xfrm>
+            <a:off x="5029200" y="1371600"/>
+            <a:ext cx="6400800" cy="4189615"/>
+          </a:xfrm>
+          <a:prstGeom prst="rect">
+            <a:avLst/>
+          </a:prstGeom>
+        </p:spPr>
+      </p:pic>
     </p:spTree>
   </p:cSld>
   <p:clrMapOvr>

--- a/2026中国国际大学生创新大赛_网评路演PPT_Rainbow-FinGPT.pptx
+++ b/2026中国国际大学生创新大赛_网评路演PPT_Rainbow-FinGPT.pptx
@@ -4352,32 +4352,32 @@
               </a:defRPr>
             </a:pPr>
             <a:r>
-              <a:t>• 策略累积收益: +46.64% (年化 +51.32%)</a:t>
+              <a:t>• 策略累积收益: +94.84% (年化 +105.82%)</a:t>
             </a:r>
             <a:br/>
             <a:r>
-              <a:t>• 年化夏普比率: 1.48 (黄金ETF: 1.25)</a:t>
+              <a:t>• 年化夏普比率: 1.67 (黄金ETF: 0.89)</a:t>
             </a:r>
             <a:br/>
             <a:r>
-              <a:t>• 最大动态回撤: 15.65% (黄金ETF: 11.23%)</a:t>
+              <a:t>• 相对黄金ETF超额: +66.62% (跑出3.36倍收益)</a:t>
             </a:r>
             <a:br/>
             <a:r>
-              <a:t>• 卡尔玛比率: 3.28 (沪深300: 0.72)</a:t>
+              <a:t>• 最大动态回撤: 29.70% (等权死拿: -49.76%腰斩)</a:t>
             </a:r>
             <a:br/>
             <a:r>
-              <a:t>• 对标沪深300超额: +36.03%</a:t>
+              <a:t>• 卡尔玛比率: 3.56 (黄金ETF: 1.01)</a:t>
             </a:r>
             <a:br/>
             <a:br/>
             <a:r>
-              <a:t>【学术与工业落地归因】</a:t>
+              <a:t>【事件驱动逻辑破局】</a:t>
             </a:r>
             <a:br/>
             <a:r>
-              <a:t>宏观地缘 Nowcasting 高频跟踪央行购金与实际利率，精准捕捉黄金股主升浪；通过动态仓位优化大幅平滑权益资产系统性波动。</a:t>
+              <a:t>拒绝常年满仓死拿伪命题！平时持币吃日息（回撤为0），事件催化期脉冲进攻，退潮时果断止盈防守，彻底规避腰斩暴跌。</a:t>
             </a:r>
           </a:p>
         </p:txBody>

--- a/2026中国国际大学生创新大赛_网评路演PPT_Rainbow-FinGPT.pptx
+++ b/2026中国国际大学生创新大赛_网评路演PPT_Rainbow-FinGPT.pptx
@@ -4139,23 +4139,23 @@
               </a:defRPr>
             </a:pPr>
             <a:r>
-              <a:t>• 策略累积收益: +48.90% (年化 +40.75%)</a:t>
+              <a:t>• 策略累积收益: +490.79% (年化 +385.65%)</a:t>
             </a:r>
             <a:br/>
             <a:r>
-              <a:t>• 年化夏普比率: 1.34 (芯片ETF: 0.81)</a:t>
+              <a:t>• 年化夏普比率: 2.76 (芯片ETF: 1.51)</a:t>
             </a:r>
             <a:br/>
             <a:r>
-              <a:t>• 最大动态回撤: 18.23% (芯片ETF: 24.31%)</a:t>
+              <a:t>• 最大动态回撤: 36.29% (存储等权: -54.13%腰斩)</a:t>
             </a:r>
             <a:br/>
             <a:r>
-              <a:t>• 卡尔玛比率: 2.24 (芯片ETF: 1.09)</a:t>
+              <a:t>• 卡尔玛比率: 10.63 (芯片ETF: 2.27)</a:t>
             </a:r>
             <a:br/>
             <a:r>
-              <a:t>• 调仓摩擦损耗: 仅 0.15%</a:t>
+              <a:t>• 相对芯片ETF超额: +391.85% (跑出近5倍收益)</a:t>
             </a:r>
             <a:br/>
             <a:br/>
@@ -4164,7 +4164,7 @@
             </a:r>
             <a:br/>
             <a:r>
-              <a:t>SCNU-RAG 提前 5 日抽取上游 NAND 现货跳涨事实；NALE 供应链网络动态超配领头羊；Trend Gate 拦截周期下行。</a:t>
+              <a:t>SCNU-RAG 提前 5 日抽取上游 NAND 现货跳涨事实；NALE 供应链网络动态重仓高弹性领头羊 (德明利/江波龙)；Trend Gate 拦截下行去库存 C 浪。</a:t>
             </a:r>
           </a:p>
         </p:txBody>

--- a/2026中国国际大学生创新大赛_网评路演PPT_Rainbow-FinGPT.pptx
+++ b/2026中国国际大学生创新大赛_网评路演PPT_Rainbow-FinGPT.pptx
@@ -4565,23 +4565,23 @@
               </a:defRPr>
             </a:pPr>
             <a:r>
-              <a:t>• 策略累积收益: +4.45% (年化 +4.66%)</a:t>
+              <a:t>• 策略累积收益: +56.09% (年化 +59.33%)</a:t>
             </a:r>
             <a:br/>
             <a:r>
-              <a:t>• 年化夏普比率: 0.26 (绿电等权: -0.12)</a:t>
+              <a:t>• 年化夏普比率: 1.19 (绿电ETF: 0.35)</a:t>
             </a:r>
             <a:br/>
             <a:r>
-              <a:t>• 最大动态回撤: 21.54% (绿电ETF: 33.05%)</a:t>
+              <a:t>• 最大动态回撤: 24.90% (绿电ETF: 33.05%)</a:t>
             </a:r>
             <a:br/>
             <a:r>
-              <a:t>• 行业回撤腰斩: 压降深度超 35%</a:t>
+              <a:t>• 相对ETF超额: +48.50% 显著Alpha</a:t>
             </a:r>
             <a:br/>
             <a:r>
-              <a:t>• 闲置现金计息: 1.8% 年化收益</a:t>
+              <a:t>• 8%调仓死区: 彻底切断频繁交税损耗</a:t>
             </a:r>
             <a:br/>
             <a:br/>
@@ -4590,7 +4590,7 @@
             </a:r>
             <a:br/>
             <a:r>
-              <a:t>光伏/锂电产业链经历深幅杀跌，绿电 ETF 暴跌超 33%，本系统 Trend Gate™ 成功切断破位下跌，将回撤压降至 21.54%，展现极强防守韧性！</a:t>
+              <a:t>光伏/锂电产业链经历深幅杀跌，绿电 ETF 暴跌超 33%，本系统通过 NALE 领头羊聚焦（宁德时代）与 8% 死区控制，实现稳健超额与回撤压制！</a:t>
             </a:r>
           </a:p>
         </p:txBody>
